--- a/dist/초1/수학/수와연산/초1_수학_수와연산_10_받아올림이있는덧셈_학생용.pptx
+++ b/dist/초1/수학/수와연산/초1_수학_수와연산_10_받아올림이있는덧셈_학생용.pptx
@@ -118,38 +118,38 @@
   <p:extLst>
     <p:ext uri="{521415D9-36F7-43E2-AB2F-B90AF26B5E84}">
       <p14:sectionLst xmlns:p14="http://schemas.microsoft.com/office/powerpoint/2010/main">
-        <p14:section name="도입" id="{ac1b3f81-1ae6-2d01-4ef9-aee950d08453}">
+        <p14:section name="도입" id="{30739c7a-d456-913f-1f74-541c1353117a}">
           <p14:sldIdLst>
             <p14:sldId id="256"/>
             <p14:sldId id="257"/>
           </p14:sldIdLst>
         </p14:section>
-        <p14:section name="개념" id="{063be2cd-ff08-3f64-0fd1-3a02e30efcba}">
+        <p14:section name="개념" id="{af3d87e0-37b4-c82f-afbd-398ffdde4da7}">
           <p14:sldIdLst>
             <p14:sldId id="258"/>
             <p14:sldId id="259"/>
             <p14:sldId id="260"/>
           </p14:sldIdLst>
         </p14:section>
-        <p14:section name="연습" id="{76290169-731c-23f2-4637-a174658de239}">
+        <p14:section name="연습" id="{0d66c9d0-8970-ed4e-549f-59344ace65a1}">
           <p14:sldIdLst>
             <p14:sldId id="261"/>
             <p14:sldId id="262"/>
             <p14:sldId id="263"/>
           </p14:sldIdLst>
         </p14:section>
-        <p14:section name="확인" id="{8f699d52-2e1f-3a92-13d9-8309af754dfd}">
+        <p14:section name="확인" id="{bd5f3153-4f3d-2002-a5c2-21f307911853}">
           <p14:sldIdLst>
             <p14:sldId id="264"/>
             <p14:sldId id="265"/>
           </p14:sldIdLst>
         </p14:section>
-        <p14:section name="정리" id="{1509adbc-173d-5a3a-546c-8c4f0b71afb3}">
+        <p14:section name="정리" id="{2fea8efb-f0bc-b2c3-09df-702f2b044bb7}">
           <p14:sldIdLst>
             <p14:sldId id="266"/>
           </p14:sldIdLst>
         </p14:section>
-        <p14:section name="보충" id="{0e7154e0-a7af-b3d6-151d-5e925aa2f140}">
+        <p14:section name="보충" id="{bc7db88f-9053-3467-3812-a4503718e24e}">
           <p14:sldIdLst>
             <p14:sldId id="267"/>
           </p14:sldIdLst>

--- a/dist/초1/수학/수와연산/초1_수학_수와연산_10_받아올림이있는덧셈_학생용.pptx
+++ b/dist/초1/수학/수와연산/초1_수학_수와연산_10_받아올림이있는덧셈_학생용.pptx
@@ -118,38 +118,38 @@
   <p:extLst>
     <p:ext uri="{521415D9-36F7-43E2-AB2F-B90AF26B5E84}">
       <p14:sectionLst xmlns:p14="http://schemas.microsoft.com/office/powerpoint/2010/main">
-        <p14:section name="도입" id="{30739c7a-d456-913f-1f74-541c1353117a}">
+        <p14:section name="도입" id="{02840ce9-9cae-6d4e-d1c6-bbefe0b85f53}">
           <p14:sldIdLst>
             <p14:sldId id="256"/>
             <p14:sldId id="257"/>
           </p14:sldIdLst>
         </p14:section>
-        <p14:section name="개념" id="{af3d87e0-37b4-c82f-afbd-398ffdde4da7}">
+        <p14:section name="개념" id="{f8a74434-4868-b70e-452d-db2fedc2925f}">
           <p14:sldIdLst>
             <p14:sldId id="258"/>
             <p14:sldId id="259"/>
             <p14:sldId id="260"/>
           </p14:sldIdLst>
         </p14:section>
-        <p14:section name="연습" id="{0d66c9d0-8970-ed4e-549f-59344ace65a1}">
+        <p14:section name="연습" id="{73a58b24-0561-5b54-3799-1c72d96034e9}">
           <p14:sldIdLst>
             <p14:sldId id="261"/>
             <p14:sldId id="262"/>
             <p14:sldId id="263"/>
           </p14:sldIdLst>
         </p14:section>
-        <p14:section name="확인" id="{bd5f3153-4f3d-2002-a5c2-21f307911853}">
+        <p14:section name="확인" id="{f310cd20-a4de-ada7-fe55-310fff049514}">
           <p14:sldIdLst>
             <p14:sldId id="264"/>
             <p14:sldId id="265"/>
           </p14:sldIdLst>
         </p14:section>
-        <p14:section name="정리" id="{2fea8efb-f0bc-b2c3-09df-702f2b044bb7}">
+        <p14:section name="정리" id="{a7e7852b-bf60-89a0-60f7-e2af11b4a80a}">
           <p14:sldIdLst>
             <p14:sldId id="266"/>
           </p14:sldIdLst>
         </p14:section>
-        <p14:section name="보충" id="{bc7db88f-9053-3467-3812-a4503718e24e}">
+        <p14:section name="보충" id="{0ad7e979-b80c-6111-5d69-5577b08b7013}">
           <p14:sldIdLst>
             <p14:sldId id="267"/>
           </p14:sldIdLst>
@@ -5986,7 +5986,7 @@
         </p:nvSpPr>
         <p:spPr>
           <a:xfrm>
-            <a:off x="548640" y="3465576"/>
+            <a:off x="548640" y="3488436"/>
             <a:ext cx="566928" cy="566928"/>
           </a:xfrm>
           <a:prstGeom prst="roundRect">
@@ -6033,8 +6033,8 @@
         </p:nvSpPr>
         <p:spPr>
           <a:xfrm flipH="1" flipV="1">
-            <a:off x="2593848" y="3627120"/>
-            <a:ext cx="853440" cy="243840"/>
+            <a:off x="3207258" y="3646170"/>
+            <a:ext cx="880110" cy="251460"/>
           </a:xfrm>
           <a:prstGeom prst="line">
             <a:avLst/>
@@ -6056,8 +6056,8 @@
         </p:nvSpPr>
         <p:spPr>
           <a:xfrm flipV="1">
-            <a:off x="3447288" y="3627120"/>
-            <a:ext cx="853440" cy="243840"/>
+            <a:off x="4087368" y="3646170"/>
+            <a:ext cx="880110" cy="251460"/>
           </a:xfrm>
           <a:prstGeom prst="line">
             <a:avLst/>
@@ -6079,8 +6079,8 @@
         </p:nvSpPr>
         <p:spPr>
           <a:xfrm>
-            <a:off x="3142488" y="3870960"/>
-            <a:ext cx="609600" cy="609600"/>
+            <a:off x="3773043" y="3897630"/>
+            <a:ext cx="628650" cy="628650"/>
           </a:xfrm>
           <a:prstGeom prst="ellipse">
             <a:avLst/>
@@ -6102,7 +6102,7 @@
             <a:pPr eaLnBrk="0" algn="ctr" indent="0" marL="0">
               <a:buNone/>
             </a:pPr>
-            <a:endParaRPr lang="ko-KR" sz="2400" dirty="0"/>
+            <a:endParaRPr lang="ko-KR" sz="2500" dirty="0"/>
           </a:p>
         </p:txBody>
       </p:sp>
@@ -6114,8 +6114,8 @@
         </p:nvSpPr>
         <p:spPr>
           <a:xfrm>
-            <a:off x="2289048" y="3017520"/>
-            <a:ext cx="609600" cy="609600"/>
+            <a:off x="2892933" y="3017520"/>
+            <a:ext cx="628650" cy="628650"/>
           </a:xfrm>
           <a:prstGeom prst="ellipse">
             <a:avLst/>
@@ -6138,7 +6138,7 @@
               <a:buNone/>
             </a:pPr>
             <a:r>
-              <a:rPr lang="ko-KR" altLang="en-US" sz="2400" b="1" dirty="0">
+              <a:rPr lang="ko-KR" altLang="en-US" sz="2500" b="1" dirty="0">
                 <a:solidFill>
                   <a:srgbClr val="1F2937"/>
                 </a:solidFill>
@@ -6148,7 +6148,7 @@
               </a:rPr>
               <a:t>10</a:t>
             </a:r>
-            <a:endParaRPr lang="ko-KR" sz="2400" dirty="0"/>
+            <a:endParaRPr lang="ko-KR" sz="2500" dirty="0"/>
           </a:p>
         </p:txBody>
       </p:sp>
@@ -6160,8 +6160,8 @@
         </p:nvSpPr>
         <p:spPr>
           <a:xfrm>
-            <a:off x="3995928" y="3017520"/>
-            <a:ext cx="609600" cy="609600"/>
+            <a:off x="4653153" y="3017520"/>
+            <a:ext cx="628650" cy="628650"/>
           </a:xfrm>
           <a:prstGeom prst="ellipse">
             <a:avLst/>
@@ -6184,7 +6184,7 @@
               <a:buNone/>
             </a:pPr>
             <a:r>
-              <a:rPr lang="ko-KR" altLang="en-US" sz="2400" b="1" dirty="0">
+              <a:rPr lang="ko-KR" altLang="en-US" sz="2500" b="1" dirty="0">
                 <a:solidFill>
                   <a:srgbClr val="1F2937"/>
                 </a:solidFill>
@@ -6194,7 +6194,7 @@
               </a:rPr>
               <a:t>4</a:t>
             </a:r>
-            <a:endParaRPr lang="ko-KR" sz="2400" dirty="0"/>
+            <a:endParaRPr lang="ko-KR" sz="2500" dirty="0"/>
           </a:p>
         </p:txBody>
       </p:sp>
@@ -6206,7 +6206,7 @@
         </p:nvSpPr>
         <p:spPr>
           <a:xfrm>
-            <a:off x="548640" y="5157216"/>
+            <a:off x="548640" y="5180076"/>
             <a:ext cx="566928" cy="566928"/>
           </a:xfrm>
           <a:prstGeom prst="roundRect">
@@ -6253,8 +6253,8 @@
         </p:nvSpPr>
         <p:spPr>
           <a:xfrm flipH="1">
-            <a:off x="2593848" y="5318760"/>
-            <a:ext cx="853440" cy="243840"/>
+            <a:off x="3207258" y="5337810"/>
+            <a:ext cx="880110" cy="251460"/>
           </a:xfrm>
           <a:prstGeom prst="line">
             <a:avLst/>
@@ -6276,8 +6276,8 @@
         </p:nvSpPr>
         <p:spPr>
           <a:xfrm>
-            <a:off x="3447288" y="5318760"/>
-            <a:ext cx="853440" cy="243840"/>
+            <a:off x="4087368" y="5337810"/>
+            <a:ext cx="880110" cy="251460"/>
           </a:xfrm>
           <a:prstGeom prst="line">
             <a:avLst/>
@@ -6299,8 +6299,8 @@
         </p:nvSpPr>
         <p:spPr>
           <a:xfrm>
-            <a:off x="3142488" y="4709160"/>
-            <a:ext cx="609600" cy="609600"/>
+            <a:off x="3773043" y="4709160"/>
+            <a:ext cx="628650" cy="628650"/>
           </a:xfrm>
           <a:prstGeom prst="ellipse">
             <a:avLst/>
@@ -6323,7 +6323,7 @@
               <a:buNone/>
             </a:pPr>
             <a:r>
-              <a:rPr lang="ko-KR" altLang="en-US" sz="2400" b="1" dirty="0">
+              <a:rPr lang="ko-KR" altLang="en-US" sz="2500" b="1" dirty="0">
                 <a:solidFill>
                   <a:srgbClr val="1F2937"/>
                 </a:solidFill>
@@ -6333,7 +6333,7 @@
               </a:rPr>
               <a:t>6</a:t>
             </a:r>
-            <a:endParaRPr lang="ko-KR" sz="2400" dirty="0"/>
+            <a:endParaRPr lang="ko-KR" sz="2500" dirty="0"/>
           </a:p>
         </p:txBody>
       </p:sp>
@@ -6345,8 +6345,8 @@
         </p:nvSpPr>
         <p:spPr>
           <a:xfrm>
-            <a:off x="2289048" y="5562600"/>
-            <a:ext cx="609600" cy="609600"/>
+            <a:off x="2892933" y="5589270"/>
+            <a:ext cx="628650" cy="628650"/>
           </a:xfrm>
           <a:prstGeom prst="ellipse">
             <a:avLst/>
@@ -6369,7 +6369,7 @@
               <a:buNone/>
             </a:pPr>
             <a:r>
-              <a:rPr lang="ko-KR" altLang="en-US" sz="2400" b="1" dirty="0">
+              <a:rPr lang="ko-KR" altLang="en-US" sz="2500" b="1" dirty="0">
                 <a:solidFill>
                   <a:srgbClr val="1F2937"/>
                 </a:solidFill>
@@ -6379,7 +6379,7 @@
               </a:rPr>
               <a:t>2</a:t>
             </a:r>
-            <a:endParaRPr lang="ko-KR" sz="2400" dirty="0"/>
+            <a:endParaRPr lang="ko-KR" sz="2500" dirty="0"/>
           </a:p>
         </p:txBody>
       </p:sp>
@@ -6391,8 +6391,8 @@
         </p:nvSpPr>
         <p:spPr>
           <a:xfrm>
-            <a:off x="3995928" y="5562600"/>
-            <a:ext cx="609600" cy="609600"/>
+            <a:off x="4653153" y="5589270"/>
+            <a:ext cx="628650" cy="628650"/>
           </a:xfrm>
           <a:prstGeom prst="ellipse">
             <a:avLst/>
@@ -6414,7 +6414,7 @@
             <a:pPr eaLnBrk="0" algn="ctr" indent="0" marL="0">
               <a:buNone/>
             </a:pPr>
-            <a:endParaRPr lang="ko-KR" sz="2400" dirty="0"/>
+            <a:endParaRPr lang="ko-KR" sz="2500" dirty="0"/>
           </a:p>
         </p:txBody>
       </p:sp>

--- a/dist/초1/수학/수와연산/초1_수학_수와연산_10_받아올림이있는덧셈_학생용.pptx
+++ b/dist/초1/수학/수와연산/초1_수학_수와연산_10_받아올림이있는덧셈_학생용.pptx
@@ -118,38 +118,38 @@
   <p:extLst>
     <p:ext uri="{521415D9-36F7-43E2-AB2F-B90AF26B5E84}">
       <p14:sectionLst xmlns:p14="http://schemas.microsoft.com/office/powerpoint/2010/main">
-        <p14:section name="도입" id="{02840ce9-9cae-6d4e-d1c6-bbefe0b85f53}">
+        <p14:section name="도입" id="{105c0420-bf94-9800-716d-2967787c87ef}">
           <p14:sldIdLst>
             <p14:sldId id="256"/>
             <p14:sldId id="257"/>
           </p14:sldIdLst>
         </p14:section>
-        <p14:section name="개념" id="{f8a74434-4868-b70e-452d-db2fedc2925f}">
+        <p14:section name="개념" id="{dddfc89d-6edf-baa9-2ed8-a91ab408a4ae}">
           <p14:sldIdLst>
             <p14:sldId id="258"/>
             <p14:sldId id="259"/>
             <p14:sldId id="260"/>
           </p14:sldIdLst>
         </p14:section>
-        <p14:section name="연습" id="{73a58b24-0561-5b54-3799-1c72d96034e9}">
+        <p14:section name="연습" id="{40c64d61-707d-878f-f01b-d2971343d7dd}">
           <p14:sldIdLst>
             <p14:sldId id="261"/>
             <p14:sldId id="262"/>
             <p14:sldId id="263"/>
           </p14:sldIdLst>
         </p14:section>
-        <p14:section name="확인" id="{f310cd20-a4de-ada7-fe55-310fff049514}">
+        <p14:section name="확인" id="{58eed3f2-08c6-fb38-9d0f-856e604f6bde}">
           <p14:sldIdLst>
             <p14:sldId id="264"/>
             <p14:sldId id="265"/>
           </p14:sldIdLst>
         </p14:section>
-        <p14:section name="정리" id="{a7e7852b-bf60-89a0-60f7-e2af11b4a80a}">
+        <p14:section name="정리" id="{d03a9c3c-90b8-9522-3e66-ca73e86d97a8}">
           <p14:sldIdLst>
             <p14:sldId id="266"/>
           </p14:sldIdLst>
         </p14:section>
-        <p14:section name="보충" id="{0ad7e979-b80c-6111-5d69-5577b08b7013}">
+        <p14:section name="보충" id="{57fde18f-073c-d1ea-d94b-b2502e4df22d}">
           <p14:sldIdLst>
             <p14:sldId id="267"/>
           </p14:sldIdLst>
